--- a/assets/memos/B3-memo.pptx
+++ b/assets/memos/B3-memo.pptx
@@ -3105,8 +3105,8 @@
         </p:nvSpPr>
         <p:spPr>
           <a:xfrm>
-            <a:off x="648000" y="1180800"/>
-            <a:ext cx="5058000" cy="511200"/>
+            <a:off x="532800" y="1180800"/>
+            <a:ext cx="6490800" cy="511200"/>
           </a:xfrm>
           <a:prstGeom prst="rect">
             <a:avLst/>
@@ -3128,7 +3128,7 @@
               </a:spcAft>
             </a:pPr>
             <a:r>
-              <a:rPr sz="2000" b="1" i="0">
+              <a:rPr sz="1800" b="1" i="0">
                 <a:solidFill>
                   <a:srgbClr val="4388BC"/>
                 </a:solidFill>
@@ -4562,8 +4562,8 @@
         </p:nvSpPr>
         <p:spPr>
           <a:xfrm>
-            <a:off x="648000" y="1180800"/>
-            <a:ext cx="5058000" cy="511200"/>
+            <a:off x="532800" y="1180800"/>
+            <a:ext cx="6490800" cy="511200"/>
           </a:xfrm>
           <a:prstGeom prst="rect">
             <a:avLst/>
@@ -4585,7 +4585,7 @@
               </a:spcAft>
             </a:pPr>
             <a:r>
-              <a:rPr sz="2000" b="1" i="0">
+              <a:rPr sz="1800" b="1" i="0">
                 <a:solidFill>
                   <a:srgbClr val="4388BC"/>
                 </a:solidFill>

--- a/assets/memos/B3-memo.pptx
+++ b/assets/memos/B3-memo.pptx
@@ -3402,7 +3402,7 @@
                 </a:solidFill>
                 <a:latin typeface="Arial"/>
               </a:rPr>
-              <a:t>→ Vous avez besoin d'un compte existant pour utiliser FranceConnect…</a:t>
+              <a:t>→ Vous avez besoin d'un compte existant pour utiliser FranceConnect. Suivez ces étapes simples :</a:t>
             </a:r>
           </a:p>
           <a:p>
@@ -3440,7 +3440,7 @@
                 </a:solidFill>
                 <a:latin typeface="Arial"/>
               </a:rPr>
-              <a:t>→ Avez-vous déjà un compte impots.gouv.fr, Ameli.fr, La Poste, MSA …</a:t>
+              <a:t>→ Avez-vous déjà un compte impots.gouv.fr, Ameli.fr, La Poste, MSA ou France Identité ?</a:t>
             </a:r>
           </a:p>
           <a:p>
@@ -3727,7 +3727,7 @@
                 </a:solidFill>
                 <a:latin typeface="Arial"/>
               </a:rPr>
-              <a:t>→ Accédez à des centaines de services : Ameli, impots.gouv, CAF, Mo…</a:t>
+              <a:t>→ Accédez à des centaines de services : Ameli, impots.gouv, CAF, Mon Espace Santé, France Travail</a:t>
             </a:r>
           </a:p>
           <a:p>
@@ -3765,7 +3765,7 @@
                 </a:solidFill>
                 <a:latin typeface="Arial"/>
               </a:rPr>
-              <a:t>→ Aucun mot de passe supplémentaire. FranceConnect ne stocke pas vo…</a:t>
+              <a:t>→ Aucun mot de passe supplémentaire. FranceConnect ne stocke pas vos données — il vérifie votre identité.</a:t>
             </a:r>
           </a:p>
         </p:txBody>
@@ -4377,7 +4377,7 @@
                 </a:solidFill>
                 <a:latin typeface="Arial"/>
               </a:rPr>
-              <a:t>→ Rouvrez-le et tapez l'adresse du site directement (pas de raccour…</a:t>
+              <a:t>→ Rouvrez-le et tapez l'adresse du site directement (pas de raccourci)</a:t>
             </a:r>
           </a:p>
         </p:txBody>
@@ -4897,7 +4897,7 @@
                 </a:solidFill>
                 <a:latin typeface="Arial"/>
               </a:rPr>
-              <a:t>→ Vous êtes sur votre ordinateur personnel (pas un appareil partagé…</a:t>
+              <a:t>→ Vous êtes sur votre ordinateur personnel (pas un appareil partagé)</a:t>
             </a:r>
           </a:p>
           <a:p>
@@ -5203,7 +5203,7 @@
                 </a:solidFill>
                 <a:latin typeface="Arial"/>
               </a:rPr>
-              <a:t>→ B) Un service d'État qui vous permet d'accéder à 1 800+ services …</a:t>
+              <a:t>→ B) Un service d'État qui vous permet d'accéder à 1 800+ services avec un seul identifiant</a:t>
             </a:r>
           </a:p>
           <a:p>

--- a/assets/memos/B3-memo.pptx
+++ b/assets/memos/B3-memo.pptx
@@ -3167,7 +3167,7 @@
         <p:spPr>
           <a:xfrm>
             <a:off x="532800" y="1749600"/>
-            <a:ext cx="6490800" cy="1371600"/>
+            <a:ext cx="6490800" cy="1533600"/>
           </a:xfrm>
           <a:prstGeom prst="rect">
             <a:avLst/>
@@ -3208,7 +3208,7 @@
         <p:spPr>
           <a:xfrm>
             <a:off x="532800" y="1749600"/>
-            <a:ext cx="572400" cy="1371600"/>
+            <a:ext cx="572400" cy="1533600"/>
           </a:xfrm>
           <a:prstGeom prst="rect">
             <a:avLst/>
@@ -3374,7 +3374,7 @@
         <p:spPr>
           <a:xfrm>
             <a:off x="1159200" y="2214000"/>
-            <a:ext cx="5828400" cy="885600"/>
+            <a:ext cx="5828400" cy="1033199"/>
           </a:xfrm>
           <a:prstGeom prst="rect">
             <a:avLst/>
@@ -3472,8 +3472,8 @@
         </p:nvSpPr>
         <p:spPr>
           <a:xfrm>
-            <a:off x="532800" y="3186000"/>
-            <a:ext cx="6490800" cy="1371600"/>
+            <a:off x="532800" y="3348000"/>
+            <a:ext cx="6490800" cy="1533600"/>
           </a:xfrm>
           <a:prstGeom prst="rect">
             <a:avLst/>
@@ -3513,8 +3513,8 @@
         </p:nvSpPr>
         <p:spPr>
           <a:xfrm>
-            <a:off x="532800" y="3186000"/>
-            <a:ext cx="572400" cy="1371600"/>
+            <a:off x="532800" y="3348000"/>
+            <a:ext cx="572400" cy="1533600"/>
           </a:xfrm>
           <a:prstGeom prst="rect">
             <a:avLst/>
@@ -3554,7 +3554,7 @@
         </p:nvSpPr>
         <p:spPr>
           <a:xfrm>
-            <a:off x="1206000" y="3607200"/>
+            <a:off x="1206000" y="3769200"/>
             <a:ext cx="5752800" cy="7200"/>
           </a:xfrm>
           <a:prstGeom prst="rect">
@@ -3595,7 +3595,7 @@
         </p:nvSpPr>
         <p:spPr>
           <a:xfrm>
-            <a:off x="532800" y="3252600"/>
+            <a:off x="532800" y="3414600"/>
             <a:ext cx="572400" cy="288000"/>
           </a:xfrm>
           <a:prstGeom prst="rect">
@@ -3637,7 +3637,7 @@
         </p:nvSpPr>
         <p:spPr>
           <a:xfrm>
-            <a:off x="1177200" y="3221999"/>
+            <a:off x="1177200" y="3384000"/>
             <a:ext cx="5810400" cy="370799"/>
           </a:xfrm>
           <a:prstGeom prst="rect">
@@ -3679,8 +3679,8 @@
         </p:nvSpPr>
         <p:spPr>
           <a:xfrm>
-            <a:off x="1159200" y="3650399"/>
-            <a:ext cx="5828400" cy="885600"/>
+            <a:off x="1159200" y="3812400"/>
+            <a:ext cx="5828400" cy="1033199"/>
           </a:xfrm>
           <a:prstGeom prst="rect">
             <a:avLst/>
@@ -3778,7 +3778,7 @@
         </p:nvSpPr>
         <p:spPr>
           <a:xfrm>
-            <a:off x="532800" y="4622400"/>
+            <a:off x="532800" y="4946400"/>
             <a:ext cx="6490800" cy="1371600"/>
           </a:xfrm>
           <a:prstGeom prst="rect">
@@ -3819,7 +3819,7 @@
         </p:nvSpPr>
         <p:spPr>
           <a:xfrm>
-            <a:off x="532800" y="4622400"/>
+            <a:off x="532800" y="4946400"/>
             <a:ext cx="572400" cy="1371600"/>
           </a:xfrm>
           <a:prstGeom prst="rect">
@@ -3860,7 +3860,7 @@
         </p:nvSpPr>
         <p:spPr>
           <a:xfrm>
-            <a:off x="1206000" y="5043600"/>
+            <a:off x="1206000" y="5367600"/>
             <a:ext cx="5752800" cy="7200"/>
           </a:xfrm>
           <a:prstGeom prst="rect">
@@ -3901,7 +3901,7 @@
         </p:nvSpPr>
         <p:spPr>
           <a:xfrm>
-            <a:off x="532800" y="4689000"/>
+            <a:off x="532800" y="5013000"/>
             <a:ext cx="572400" cy="288000"/>
           </a:xfrm>
           <a:prstGeom prst="rect">
@@ -3943,7 +3943,7 @@
         </p:nvSpPr>
         <p:spPr>
           <a:xfrm>
-            <a:off x="1177200" y="4658400"/>
+            <a:off x="1177200" y="4982400"/>
             <a:ext cx="5810400" cy="370799"/>
           </a:xfrm>
           <a:prstGeom prst="rect">
@@ -3985,8 +3985,8 @@
         </p:nvSpPr>
         <p:spPr>
           <a:xfrm>
-            <a:off x="1159200" y="5086800"/>
-            <a:ext cx="5828400" cy="885600"/>
+            <a:off x="1159200" y="5410800"/>
+            <a:ext cx="5828400" cy="871200"/>
           </a:xfrm>
           <a:prstGeom prst="rect">
             <a:avLst/>
@@ -4084,7 +4084,7 @@
         </p:nvSpPr>
         <p:spPr>
           <a:xfrm>
-            <a:off x="532800" y="6058799"/>
+            <a:off x="532800" y="6382800"/>
             <a:ext cx="6490800" cy="1371600"/>
           </a:xfrm>
           <a:prstGeom prst="rect">
@@ -4125,7 +4125,7 @@
         </p:nvSpPr>
         <p:spPr>
           <a:xfrm>
-            <a:off x="532800" y="6058799"/>
+            <a:off x="532800" y="6382800"/>
             <a:ext cx="572400" cy="1371600"/>
           </a:xfrm>
           <a:prstGeom prst="rect">
@@ -4166,7 +4166,7 @@
         </p:nvSpPr>
         <p:spPr>
           <a:xfrm>
-            <a:off x="1206000" y="6480000"/>
+            <a:off x="1206000" y="6803999"/>
             <a:ext cx="5752800" cy="7200"/>
           </a:xfrm>
           <a:prstGeom prst="rect">
@@ -4207,7 +4207,7 @@
         </p:nvSpPr>
         <p:spPr>
           <a:xfrm>
-            <a:off x="532800" y="6125399"/>
+            <a:off x="532800" y="6449400"/>
             <a:ext cx="572400" cy="288000"/>
           </a:xfrm>
           <a:prstGeom prst="rect">
@@ -4249,7 +4249,7 @@
         </p:nvSpPr>
         <p:spPr>
           <a:xfrm>
-            <a:off x="1177200" y="6094800"/>
+            <a:off x="1177200" y="6418800"/>
             <a:ext cx="5810400" cy="370799"/>
           </a:xfrm>
           <a:prstGeom prst="rect">
@@ -4291,8 +4291,8 @@
         </p:nvSpPr>
         <p:spPr>
           <a:xfrm>
-            <a:off x="1159200" y="6523200"/>
-            <a:ext cx="5828400" cy="885600"/>
+            <a:off x="1159200" y="6847200"/>
+            <a:ext cx="5828400" cy="871200"/>
           </a:xfrm>
           <a:prstGeom prst="rect">
             <a:avLst/>
@@ -4390,7 +4390,7 @@
         </p:nvSpPr>
         <p:spPr>
           <a:xfrm>
-            <a:off x="532800" y="7639200"/>
+            <a:off x="532800" y="7891199"/>
             <a:ext cx="6490800" cy="658800"/>
           </a:xfrm>
           <a:prstGeom prst="rect">
@@ -4433,7 +4433,7 @@
         </p:nvSpPr>
         <p:spPr>
           <a:xfrm>
-            <a:off x="1540799" y="7675200"/>
+            <a:off x="1540799" y="7927200"/>
             <a:ext cx="5410800" cy="604800"/>
           </a:xfrm>
           <a:prstGeom prst="rect">
@@ -4831,7 +4831,7 @@
         <p:spPr>
           <a:xfrm>
             <a:off x="1159200" y="2214000"/>
-            <a:ext cx="5828400" cy="885600"/>
+            <a:ext cx="5828400" cy="871200"/>
           </a:xfrm>
           <a:prstGeom prst="rect">
             <a:avLst/>
@@ -4930,7 +4930,7 @@
         <p:spPr>
           <a:xfrm>
             <a:off x="532800" y="3186000"/>
-            <a:ext cx="6490800" cy="1371600"/>
+            <a:ext cx="6490800" cy="1382400"/>
           </a:xfrm>
           <a:prstGeom prst="rect">
             <a:avLst/>
@@ -4971,7 +4971,7 @@
         <p:spPr>
           <a:xfrm>
             <a:off x="532800" y="3186000"/>
-            <a:ext cx="572400" cy="1371600"/>
+            <a:ext cx="572400" cy="1382400"/>
           </a:xfrm>
           <a:prstGeom prst="rect">
             <a:avLst/>
@@ -5137,7 +5137,7 @@
         <p:spPr>
           <a:xfrm>
             <a:off x="1159200" y="3650399"/>
-            <a:ext cx="5828400" cy="885600"/>
+            <a:ext cx="5828400" cy="881999"/>
           </a:xfrm>
           <a:prstGeom prst="rect">
             <a:avLst/>

--- a/assets/memos/B3-memo.pptx
+++ b/assets/memos/B3-memo.pptx
@@ -3097,9 +3097,35 @@
         <p:nvPr/>
       </p:nvGrpSpPr>
       <p:grpSpPr/>
-      <p:sp>
-        <p:nvSpPr>
-          <p:cNvPr id="2" name="TextBox 1"/>
+      <p:pic>
+        <p:nvPicPr>
+          <p:cNvPr id="2" name="Picture 1" descr="bg-p1.png"/>
+          <p:cNvPicPr>
+            <a:picLocks noChangeAspect="1"/>
+          </p:cNvPicPr>
+          <p:nvPr/>
+        </p:nvPicPr>
+        <p:blipFill>
+          <a:blip r:embed="rId2">
+            <a:alphaModFix amt="80000"/>
+          </a:blip>
+          <a:stretch>
+            <a:fillRect/>
+          </a:stretch>
+        </p:blipFill>
+        <p:spPr>
+          <a:xfrm>
+            <a:off x="0" y="0"/>
+            <a:ext cx="7556399" cy="10692000"/>
+          </a:xfrm>
+          <a:prstGeom prst="rect">
+            <a:avLst/>
+          </a:prstGeom>
+        </p:spPr>
+      </p:pic>
+      <p:sp>
+        <p:nvSpPr>
+          <p:cNvPr id="3" name="TextBox 2"/>
           <p:cNvSpPr txBox="1"/>
           <p:nvPr/>
         </p:nvSpPr>
@@ -3160,7 +3186,7 @@
       </p:sp>
       <p:sp>
         <p:nvSpPr>
-          <p:cNvPr id="3" name="Rectangle 2"/>
+          <p:cNvPr id="4" name="Rectangle 3"/>
           <p:cNvSpPr/>
           <p:nvPr/>
         </p:nvSpPr>
@@ -3201,7 +3227,7 @@
       </p:sp>
       <p:sp>
         <p:nvSpPr>
-          <p:cNvPr id="4" name="Rectangle 3"/>
+          <p:cNvPr id="5" name="Rectangle 4"/>
           <p:cNvSpPr/>
           <p:nvPr/>
         </p:nvSpPr>
@@ -3242,7 +3268,7 @@
       </p:sp>
       <p:sp>
         <p:nvSpPr>
-          <p:cNvPr id="5" name="Rectangle 4"/>
+          <p:cNvPr id="6" name="Rectangle 5"/>
           <p:cNvSpPr/>
           <p:nvPr/>
         </p:nvSpPr>
@@ -3283,7 +3309,7 @@
       </p:sp>
       <p:sp>
         <p:nvSpPr>
-          <p:cNvPr id="6" name="TextBox 5"/>
+          <p:cNvPr id="7" name="TextBox 6"/>
           <p:cNvSpPr txBox="1"/>
           <p:nvPr/>
         </p:nvSpPr>
@@ -3325,7 +3351,7 @@
       </p:sp>
       <p:sp>
         <p:nvSpPr>
-          <p:cNvPr id="7" name="TextBox 6"/>
+          <p:cNvPr id="8" name="TextBox 7"/>
           <p:cNvSpPr txBox="1"/>
           <p:nvPr/>
         </p:nvSpPr>
@@ -3367,7 +3393,7 @@
       </p:sp>
       <p:sp>
         <p:nvSpPr>
-          <p:cNvPr id="8" name="TextBox 7"/>
+          <p:cNvPr id="9" name="TextBox 8"/>
           <p:cNvSpPr txBox="1"/>
           <p:nvPr/>
         </p:nvSpPr>
@@ -3466,7 +3492,7 @@
       </p:sp>
       <p:sp>
         <p:nvSpPr>
-          <p:cNvPr id="9" name="Rectangle 8"/>
+          <p:cNvPr id="10" name="Rectangle 9"/>
           <p:cNvSpPr/>
           <p:nvPr/>
         </p:nvSpPr>
@@ -3507,7 +3533,7 @@
       </p:sp>
       <p:sp>
         <p:nvSpPr>
-          <p:cNvPr id="10" name="Rectangle 9"/>
+          <p:cNvPr id="11" name="Rectangle 10"/>
           <p:cNvSpPr/>
           <p:nvPr/>
         </p:nvSpPr>
@@ -3548,7 +3574,7 @@
       </p:sp>
       <p:sp>
         <p:nvSpPr>
-          <p:cNvPr id="11" name="Rectangle 10"/>
+          <p:cNvPr id="12" name="Rectangle 11"/>
           <p:cNvSpPr/>
           <p:nvPr/>
         </p:nvSpPr>
@@ -3589,7 +3615,7 @@
       </p:sp>
       <p:sp>
         <p:nvSpPr>
-          <p:cNvPr id="12" name="TextBox 11"/>
+          <p:cNvPr id="13" name="TextBox 12"/>
           <p:cNvSpPr txBox="1"/>
           <p:nvPr/>
         </p:nvSpPr>
@@ -3631,7 +3657,7 @@
       </p:sp>
       <p:sp>
         <p:nvSpPr>
-          <p:cNvPr id="13" name="TextBox 12"/>
+          <p:cNvPr id="14" name="TextBox 13"/>
           <p:cNvSpPr txBox="1"/>
           <p:nvPr/>
         </p:nvSpPr>
@@ -3673,7 +3699,7 @@
       </p:sp>
       <p:sp>
         <p:nvSpPr>
-          <p:cNvPr id="14" name="TextBox 13"/>
+          <p:cNvPr id="15" name="TextBox 14"/>
           <p:cNvSpPr txBox="1"/>
           <p:nvPr/>
         </p:nvSpPr>
@@ -3772,7 +3798,7 @@
       </p:sp>
       <p:sp>
         <p:nvSpPr>
-          <p:cNvPr id="15" name="Rectangle 14"/>
+          <p:cNvPr id="16" name="Rectangle 15"/>
           <p:cNvSpPr/>
           <p:nvPr/>
         </p:nvSpPr>
@@ -3813,7 +3839,7 @@
       </p:sp>
       <p:sp>
         <p:nvSpPr>
-          <p:cNvPr id="16" name="Rectangle 15"/>
+          <p:cNvPr id="17" name="Rectangle 16"/>
           <p:cNvSpPr/>
           <p:nvPr/>
         </p:nvSpPr>
@@ -3854,7 +3880,7 @@
       </p:sp>
       <p:sp>
         <p:nvSpPr>
-          <p:cNvPr id="17" name="Rectangle 16"/>
+          <p:cNvPr id="18" name="Rectangle 17"/>
           <p:cNvSpPr/>
           <p:nvPr/>
         </p:nvSpPr>
@@ -3895,7 +3921,7 @@
       </p:sp>
       <p:sp>
         <p:nvSpPr>
-          <p:cNvPr id="18" name="TextBox 17"/>
+          <p:cNvPr id="19" name="TextBox 18"/>
           <p:cNvSpPr txBox="1"/>
           <p:nvPr/>
         </p:nvSpPr>
@@ -3937,7 +3963,7 @@
       </p:sp>
       <p:sp>
         <p:nvSpPr>
-          <p:cNvPr id="19" name="TextBox 18"/>
+          <p:cNvPr id="20" name="TextBox 19"/>
           <p:cNvSpPr txBox="1"/>
           <p:nvPr/>
         </p:nvSpPr>
@@ -3979,7 +4005,7 @@
       </p:sp>
       <p:sp>
         <p:nvSpPr>
-          <p:cNvPr id="20" name="TextBox 19"/>
+          <p:cNvPr id="21" name="TextBox 20"/>
           <p:cNvSpPr txBox="1"/>
           <p:nvPr/>
         </p:nvSpPr>
@@ -4078,7 +4104,7 @@
       </p:sp>
       <p:sp>
         <p:nvSpPr>
-          <p:cNvPr id="21" name="Rectangle 20"/>
+          <p:cNvPr id="22" name="Rectangle 21"/>
           <p:cNvSpPr/>
           <p:nvPr/>
         </p:nvSpPr>
@@ -4119,7 +4145,7 @@
       </p:sp>
       <p:sp>
         <p:nvSpPr>
-          <p:cNvPr id="22" name="Rectangle 21"/>
+          <p:cNvPr id="23" name="Rectangle 22"/>
           <p:cNvSpPr/>
           <p:nvPr/>
         </p:nvSpPr>
@@ -4160,7 +4186,7 @@
       </p:sp>
       <p:sp>
         <p:nvSpPr>
-          <p:cNvPr id="23" name="Rectangle 22"/>
+          <p:cNvPr id="24" name="Rectangle 23"/>
           <p:cNvSpPr/>
           <p:nvPr/>
         </p:nvSpPr>
@@ -4201,7 +4227,7 @@
       </p:sp>
       <p:sp>
         <p:nvSpPr>
-          <p:cNvPr id="24" name="TextBox 23"/>
+          <p:cNvPr id="25" name="TextBox 24"/>
           <p:cNvSpPr txBox="1"/>
           <p:nvPr/>
         </p:nvSpPr>
@@ -4243,7 +4269,7 @@
       </p:sp>
       <p:sp>
         <p:nvSpPr>
-          <p:cNvPr id="25" name="TextBox 24"/>
+          <p:cNvPr id="26" name="TextBox 25"/>
           <p:cNvSpPr txBox="1"/>
           <p:nvPr/>
         </p:nvSpPr>
@@ -4285,7 +4311,7 @@
       </p:sp>
       <p:sp>
         <p:nvSpPr>
-          <p:cNvPr id="26" name="TextBox 25"/>
+          <p:cNvPr id="27" name="TextBox 26"/>
           <p:cNvSpPr txBox="1"/>
           <p:nvPr/>
         </p:nvSpPr>
@@ -4384,7 +4410,7 @@
       </p:sp>
       <p:sp>
         <p:nvSpPr>
-          <p:cNvPr id="27" name="Rectangle 26"/>
+          <p:cNvPr id="28" name="Rectangle 27"/>
           <p:cNvSpPr/>
           <p:nvPr/>
         </p:nvSpPr>
@@ -4427,7 +4453,7 @@
       </p:sp>
       <p:sp>
         <p:nvSpPr>
-          <p:cNvPr id="28" name="TextBox 27"/>
+          <p:cNvPr id="29" name="TextBox 28"/>
           <p:cNvSpPr txBox="1"/>
           <p:nvPr/>
         </p:nvSpPr>
@@ -4488,7 +4514,7 @@
       </p:sp>
       <p:sp>
         <p:nvSpPr>
-          <p:cNvPr id="29" name="TextBox 28"/>
+          <p:cNvPr id="30" name="TextBox 29"/>
           <p:cNvSpPr txBox="1"/>
           <p:nvPr/>
         </p:nvSpPr>
@@ -4554,9 +4580,35 @@
         <p:nvPr/>
       </p:nvGrpSpPr>
       <p:grpSpPr/>
-      <p:sp>
-        <p:nvSpPr>
-          <p:cNvPr id="2" name="TextBox 1"/>
+      <p:pic>
+        <p:nvPicPr>
+          <p:cNvPr id="2" name="Picture 1" descr="bg-p2.png"/>
+          <p:cNvPicPr>
+            <a:picLocks noChangeAspect="1"/>
+          </p:cNvPicPr>
+          <p:nvPr/>
+        </p:nvPicPr>
+        <p:blipFill>
+          <a:blip r:embed="rId2">
+            <a:alphaModFix amt="80000"/>
+          </a:blip>
+          <a:stretch>
+            <a:fillRect/>
+          </a:stretch>
+        </p:blipFill>
+        <p:spPr>
+          <a:xfrm>
+            <a:off x="0" y="0"/>
+            <a:ext cx="7556399" cy="10692000"/>
+          </a:xfrm>
+          <a:prstGeom prst="rect">
+            <a:avLst/>
+          </a:prstGeom>
+        </p:spPr>
+      </p:pic>
+      <p:sp>
+        <p:nvSpPr>
+          <p:cNvPr id="3" name="TextBox 2"/>
           <p:cNvSpPr txBox="1"/>
           <p:nvPr/>
         </p:nvSpPr>
@@ -4617,7 +4669,7 @@
       </p:sp>
       <p:sp>
         <p:nvSpPr>
-          <p:cNvPr id="3" name="Rectangle 2"/>
+          <p:cNvPr id="4" name="Rectangle 3"/>
           <p:cNvSpPr/>
           <p:nvPr/>
         </p:nvSpPr>
@@ -4658,7 +4710,7 @@
       </p:sp>
       <p:sp>
         <p:nvSpPr>
-          <p:cNvPr id="4" name="Rectangle 3"/>
+          <p:cNvPr id="5" name="Rectangle 4"/>
           <p:cNvSpPr/>
           <p:nvPr/>
         </p:nvSpPr>
@@ -4699,7 +4751,7 @@
       </p:sp>
       <p:sp>
         <p:nvSpPr>
-          <p:cNvPr id="5" name="Rectangle 4"/>
+          <p:cNvPr id="6" name="Rectangle 5"/>
           <p:cNvSpPr/>
           <p:nvPr/>
         </p:nvSpPr>
@@ -4740,7 +4792,7 @@
       </p:sp>
       <p:sp>
         <p:nvSpPr>
-          <p:cNvPr id="6" name="TextBox 5"/>
+          <p:cNvPr id="7" name="TextBox 6"/>
           <p:cNvSpPr txBox="1"/>
           <p:nvPr/>
         </p:nvSpPr>
@@ -4782,7 +4834,7 @@
       </p:sp>
       <p:sp>
         <p:nvSpPr>
-          <p:cNvPr id="7" name="TextBox 6"/>
+          <p:cNvPr id="8" name="TextBox 7"/>
           <p:cNvSpPr txBox="1"/>
           <p:nvPr/>
         </p:nvSpPr>
@@ -4824,7 +4876,7 @@
       </p:sp>
       <p:sp>
         <p:nvSpPr>
-          <p:cNvPr id="8" name="TextBox 7"/>
+          <p:cNvPr id="9" name="TextBox 8"/>
           <p:cNvSpPr txBox="1"/>
           <p:nvPr/>
         </p:nvSpPr>
@@ -4923,7 +4975,7 @@
       </p:sp>
       <p:sp>
         <p:nvSpPr>
-          <p:cNvPr id="9" name="Rectangle 8"/>
+          <p:cNvPr id="10" name="Rectangle 9"/>
           <p:cNvSpPr/>
           <p:nvPr/>
         </p:nvSpPr>
@@ -4964,7 +5016,7 @@
       </p:sp>
       <p:sp>
         <p:nvSpPr>
-          <p:cNvPr id="10" name="Rectangle 9"/>
+          <p:cNvPr id="11" name="Rectangle 10"/>
           <p:cNvSpPr/>
           <p:nvPr/>
         </p:nvSpPr>
@@ -5005,7 +5057,7 @@
       </p:sp>
       <p:sp>
         <p:nvSpPr>
-          <p:cNvPr id="11" name="Rectangle 10"/>
+          <p:cNvPr id="12" name="Rectangle 11"/>
           <p:cNvSpPr/>
           <p:nvPr/>
         </p:nvSpPr>
@@ -5046,7 +5098,7 @@
       </p:sp>
       <p:sp>
         <p:nvSpPr>
-          <p:cNvPr id="12" name="TextBox 11"/>
+          <p:cNvPr id="13" name="TextBox 12"/>
           <p:cNvSpPr txBox="1"/>
           <p:nvPr/>
         </p:nvSpPr>
@@ -5088,7 +5140,7 @@
       </p:sp>
       <p:sp>
         <p:nvSpPr>
-          <p:cNvPr id="13" name="TextBox 12"/>
+          <p:cNvPr id="14" name="TextBox 13"/>
           <p:cNvSpPr txBox="1"/>
           <p:nvPr/>
         </p:nvSpPr>
@@ -5130,7 +5182,7 @@
       </p:sp>
       <p:sp>
         <p:nvSpPr>
-          <p:cNvPr id="14" name="TextBox 13"/>
+          <p:cNvPr id="15" name="TextBox 14"/>
           <p:cNvSpPr txBox="1"/>
           <p:nvPr/>
         </p:nvSpPr>
@@ -5229,7 +5281,7 @@
       </p:sp>
       <p:sp>
         <p:nvSpPr>
-          <p:cNvPr id="15" name="Rectangle 14"/>
+          <p:cNvPr id="16" name="Rectangle 15"/>
           <p:cNvSpPr/>
           <p:nvPr/>
         </p:nvSpPr>
@@ -5272,7 +5324,7 @@
       </p:sp>
       <p:sp>
         <p:nvSpPr>
-          <p:cNvPr id="16" name="Rectangle 15"/>
+          <p:cNvPr id="17" name="Rectangle 16"/>
           <p:cNvSpPr/>
           <p:nvPr/>
         </p:nvSpPr>
@@ -5313,7 +5365,7 @@
       </p:sp>
       <p:sp>
         <p:nvSpPr>
-          <p:cNvPr id="17" name="TextBox 16"/>
+          <p:cNvPr id="18" name="TextBox 17"/>
           <p:cNvSpPr txBox="1"/>
           <p:nvPr/>
         </p:nvSpPr>
@@ -5431,7 +5483,7 @@
       </p:sp>
       <p:sp>
         <p:nvSpPr>
-          <p:cNvPr id="18" name="TextBox 17"/>
+          <p:cNvPr id="19" name="TextBox 18"/>
           <p:cNvSpPr txBox="1"/>
           <p:nvPr/>
         </p:nvSpPr>

--- a/assets/memos/B3-memo.pptx
+++ b/assets/memos/B3-memo.pptx
@@ -3084,9 +3084,12 @@
   <p:cSld>
     <p:bg>
       <p:bgPr>
-        <a:solidFill>
-          <a:srgbClr val="FFFFFF"/>
-        </a:solidFill>
+        <a:blipFill>
+          <a:blip r:embed="rId2"/>
+          <a:stretch>
+            <a:fillRect/>
+          </a:stretch>
+        </a:blipFill>
         <a:effectLst/>
       </p:bgPr>
     </p:bg>
@@ -3097,35 +3100,9 @@
         <p:nvPr/>
       </p:nvGrpSpPr>
       <p:grpSpPr/>
-      <p:pic>
-        <p:nvPicPr>
-          <p:cNvPr id="2" name="Picture 1" descr="bg-p1.png"/>
-          <p:cNvPicPr>
-            <a:picLocks noChangeAspect="1"/>
-          </p:cNvPicPr>
-          <p:nvPr/>
-        </p:nvPicPr>
-        <p:blipFill>
-          <a:blip r:embed="rId2">
-            <a:alphaModFix amt="80000"/>
-          </a:blip>
-          <a:stretch>
-            <a:fillRect/>
-          </a:stretch>
-        </p:blipFill>
-        <p:spPr>
-          <a:xfrm>
-            <a:off x="0" y="0"/>
-            <a:ext cx="7556399" cy="10692000"/>
-          </a:xfrm>
-          <a:prstGeom prst="rect">
-            <a:avLst/>
-          </a:prstGeom>
-        </p:spPr>
-      </p:pic>
-      <p:sp>
-        <p:nvSpPr>
-          <p:cNvPr id="3" name="TextBox 2"/>
+      <p:sp>
+        <p:nvSpPr>
+          <p:cNvPr id="2" name="TextBox 1"/>
           <p:cNvSpPr txBox="1"/>
           <p:nvPr/>
         </p:nvSpPr>
@@ -3186,7 +3163,7 @@
       </p:sp>
       <p:sp>
         <p:nvSpPr>
-          <p:cNvPr id="4" name="Rectangle 3"/>
+          <p:cNvPr id="3" name="Rectangle 2"/>
           <p:cNvSpPr/>
           <p:nvPr/>
         </p:nvSpPr>
@@ -3227,7 +3204,7 @@
       </p:sp>
       <p:sp>
         <p:nvSpPr>
-          <p:cNvPr id="5" name="Rectangle 4"/>
+          <p:cNvPr id="4" name="Rectangle 3"/>
           <p:cNvSpPr/>
           <p:nvPr/>
         </p:nvSpPr>
@@ -3268,7 +3245,7 @@
       </p:sp>
       <p:sp>
         <p:nvSpPr>
-          <p:cNvPr id="6" name="Rectangle 5"/>
+          <p:cNvPr id="5" name="Rectangle 4"/>
           <p:cNvSpPr/>
           <p:nvPr/>
         </p:nvSpPr>
@@ -3309,7 +3286,7 @@
       </p:sp>
       <p:sp>
         <p:nvSpPr>
-          <p:cNvPr id="7" name="TextBox 6"/>
+          <p:cNvPr id="6" name="TextBox 5"/>
           <p:cNvSpPr txBox="1"/>
           <p:nvPr/>
         </p:nvSpPr>
@@ -3351,7 +3328,7 @@
       </p:sp>
       <p:sp>
         <p:nvSpPr>
-          <p:cNvPr id="8" name="TextBox 7"/>
+          <p:cNvPr id="7" name="TextBox 6"/>
           <p:cNvSpPr txBox="1"/>
           <p:nvPr/>
         </p:nvSpPr>
@@ -3393,7 +3370,7 @@
       </p:sp>
       <p:sp>
         <p:nvSpPr>
-          <p:cNvPr id="9" name="TextBox 8"/>
+          <p:cNvPr id="8" name="TextBox 7"/>
           <p:cNvSpPr txBox="1"/>
           <p:nvPr/>
         </p:nvSpPr>
@@ -3492,7 +3469,7 @@
       </p:sp>
       <p:sp>
         <p:nvSpPr>
-          <p:cNvPr id="10" name="Rectangle 9"/>
+          <p:cNvPr id="9" name="Rectangle 8"/>
           <p:cNvSpPr/>
           <p:nvPr/>
         </p:nvSpPr>
@@ -3533,7 +3510,7 @@
       </p:sp>
       <p:sp>
         <p:nvSpPr>
-          <p:cNvPr id="11" name="Rectangle 10"/>
+          <p:cNvPr id="10" name="Rectangle 9"/>
           <p:cNvSpPr/>
           <p:nvPr/>
         </p:nvSpPr>
@@ -3574,7 +3551,7 @@
       </p:sp>
       <p:sp>
         <p:nvSpPr>
-          <p:cNvPr id="12" name="Rectangle 11"/>
+          <p:cNvPr id="11" name="Rectangle 10"/>
           <p:cNvSpPr/>
           <p:nvPr/>
         </p:nvSpPr>
@@ -3615,7 +3592,7 @@
       </p:sp>
       <p:sp>
         <p:nvSpPr>
-          <p:cNvPr id="13" name="TextBox 12"/>
+          <p:cNvPr id="12" name="TextBox 11"/>
           <p:cNvSpPr txBox="1"/>
           <p:nvPr/>
         </p:nvSpPr>
@@ -3657,7 +3634,7 @@
       </p:sp>
       <p:sp>
         <p:nvSpPr>
-          <p:cNvPr id="14" name="TextBox 13"/>
+          <p:cNvPr id="13" name="TextBox 12"/>
           <p:cNvSpPr txBox="1"/>
           <p:nvPr/>
         </p:nvSpPr>
@@ -3699,7 +3676,7 @@
       </p:sp>
       <p:sp>
         <p:nvSpPr>
-          <p:cNvPr id="15" name="TextBox 14"/>
+          <p:cNvPr id="14" name="TextBox 13"/>
           <p:cNvSpPr txBox="1"/>
           <p:nvPr/>
         </p:nvSpPr>
@@ -3798,7 +3775,7 @@
       </p:sp>
       <p:sp>
         <p:nvSpPr>
-          <p:cNvPr id="16" name="Rectangle 15"/>
+          <p:cNvPr id="15" name="Rectangle 14"/>
           <p:cNvSpPr/>
           <p:nvPr/>
         </p:nvSpPr>
@@ -3839,7 +3816,7 @@
       </p:sp>
       <p:sp>
         <p:nvSpPr>
-          <p:cNvPr id="17" name="Rectangle 16"/>
+          <p:cNvPr id="16" name="Rectangle 15"/>
           <p:cNvSpPr/>
           <p:nvPr/>
         </p:nvSpPr>
@@ -3880,7 +3857,7 @@
       </p:sp>
       <p:sp>
         <p:nvSpPr>
-          <p:cNvPr id="18" name="Rectangle 17"/>
+          <p:cNvPr id="17" name="Rectangle 16"/>
           <p:cNvSpPr/>
           <p:nvPr/>
         </p:nvSpPr>
@@ -3921,7 +3898,7 @@
       </p:sp>
       <p:sp>
         <p:nvSpPr>
-          <p:cNvPr id="19" name="TextBox 18"/>
+          <p:cNvPr id="18" name="TextBox 17"/>
           <p:cNvSpPr txBox="1"/>
           <p:nvPr/>
         </p:nvSpPr>
@@ -3963,7 +3940,7 @@
       </p:sp>
       <p:sp>
         <p:nvSpPr>
-          <p:cNvPr id="20" name="TextBox 19"/>
+          <p:cNvPr id="19" name="TextBox 18"/>
           <p:cNvSpPr txBox="1"/>
           <p:nvPr/>
         </p:nvSpPr>
@@ -4005,7 +3982,7 @@
       </p:sp>
       <p:sp>
         <p:nvSpPr>
-          <p:cNvPr id="21" name="TextBox 20"/>
+          <p:cNvPr id="20" name="TextBox 19"/>
           <p:cNvSpPr txBox="1"/>
           <p:nvPr/>
         </p:nvSpPr>
@@ -4104,7 +4081,7 @@
       </p:sp>
       <p:sp>
         <p:nvSpPr>
-          <p:cNvPr id="22" name="Rectangle 21"/>
+          <p:cNvPr id="21" name="Rectangle 20"/>
           <p:cNvSpPr/>
           <p:nvPr/>
         </p:nvSpPr>
@@ -4145,7 +4122,7 @@
       </p:sp>
       <p:sp>
         <p:nvSpPr>
-          <p:cNvPr id="23" name="Rectangle 22"/>
+          <p:cNvPr id="22" name="Rectangle 21"/>
           <p:cNvSpPr/>
           <p:nvPr/>
         </p:nvSpPr>
@@ -4186,7 +4163,7 @@
       </p:sp>
       <p:sp>
         <p:nvSpPr>
-          <p:cNvPr id="24" name="Rectangle 23"/>
+          <p:cNvPr id="23" name="Rectangle 22"/>
           <p:cNvSpPr/>
           <p:nvPr/>
         </p:nvSpPr>
@@ -4227,7 +4204,7 @@
       </p:sp>
       <p:sp>
         <p:nvSpPr>
-          <p:cNvPr id="25" name="TextBox 24"/>
+          <p:cNvPr id="24" name="TextBox 23"/>
           <p:cNvSpPr txBox="1"/>
           <p:nvPr/>
         </p:nvSpPr>
@@ -4269,7 +4246,7 @@
       </p:sp>
       <p:sp>
         <p:nvSpPr>
-          <p:cNvPr id="26" name="TextBox 25"/>
+          <p:cNvPr id="25" name="TextBox 24"/>
           <p:cNvSpPr txBox="1"/>
           <p:nvPr/>
         </p:nvSpPr>
@@ -4311,7 +4288,7 @@
       </p:sp>
       <p:sp>
         <p:nvSpPr>
-          <p:cNvPr id="27" name="TextBox 26"/>
+          <p:cNvPr id="26" name="TextBox 25"/>
           <p:cNvSpPr txBox="1"/>
           <p:nvPr/>
         </p:nvSpPr>
@@ -4410,7 +4387,7 @@
       </p:sp>
       <p:sp>
         <p:nvSpPr>
-          <p:cNvPr id="28" name="Rectangle 27"/>
+          <p:cNvPr id="27" name="Rectangle 26"/>
           <p:cNvSpPr/>
           <p:nvPr/>
         </p:nvSpPr>
@@ -4453,7 +4430,7 @@
       </p:sp>
       <p:sp>
         <p:nvSpPr>
-          <p:cNvPr id="29" name="TextBox 28"/>
+          <p:cNvPr id="28" name="TextBox 27"/>
           <p:cNvSpPr txBox="1"/>
           <p:nvPr/>
         </p:nvSpPr>
@@ -4514,7 +4491,7 @@
       </p:sp>
       <p:sp>
         <p:nvSpPr>
-          <p:cNvPr id="30" name="TextBox 29"/>
+          <p:cNvPr id="29" name="TextBox 28"/>
           <p:cNvSpPr txBox="1"/>
           <p:nvPr/>
         </p:nvSpPr>
@@ -4567,9 +4544,12 @@
   <p:cSld>
     <p:bg>
       <p:bgPr>
-        <a:solidFill>
-          <a:srgbClr val="FFFFFF"/>
-        </a:solidFill>
+        <a:blipFill>
+          <a:blip r:embed="rId2"/>
+          <a:stretch>
+            <a:fillRect/>
+          </a:stretch>
+        </a:blipFill>
         <a:effectLst/>
       </p:bgPr>
     </p:bg>
@@ -4580,35 +4560,9 @@
         <p:nvPr/>
       </p:nvGrpSpPr>
       <p:grpSpPr/>
-      <p:pic>
-        <p:nvPicPr>
-          <p:cNvPr id="2" name="Picture 1" descr="bg-p2.png"/>
-          <p:cNvPicPr>
-            <a:picLocks noChangeAspect="1"/>
-          </p:cNvPicPr>
-          <p:nvPr/>
-        </p:nvPicPr>
-        <p:blipFill>
-          <a:blip r:embed="rId2">
-            <a:alphaModFix amt="80000"/>
-          </a:blip>
-          <a:stretch>
-            <a:fillRect/>
-          </a:stretch>
-        </p:blipFill>
-        <p:spPr>
-          <a:xfrm>
-            <a:off x="0" y="0"/>
-            <a:ext cx="7556399" cy="10692000"/>
-          </a:xfrm>
-          <a:prstGeom prst="rect">
-            <a:avLst/>
-          </a:prstGeom>
-        </p:spPr>
-      </p:pic>
-      <p:sp>
-        <p:nvSpPr>
-          <p:cNvPr id="3" name="TextBox 2"/>
+      <p:sp>
+        <p:nvSpPr>
+          <p:cNvPr id="2" name="TextBox 1"/>
           <p:cNvSpPr txBox="1"/>
           <p:nvPr/>
         </p:nvSpPr>
@@ -4669,7 +4623,7 @@
       </p:sp>
       <p:sp>
         <p:nvSpPr>
-          <p:cNvPr id="4" name="Rectangle 3"/>
+          <p:cNvPr id="3" name="Rectangle 2"/>
           <p:cNvSpPr/>
           <p:nvPr/>
         </p:nvSpPr>
@@ -4710,7 +4664,7 @@
       </p:sp>
       <p:sp>
         <p:nvSpPr>
-          <p:cNvPr id="5" name="Rectangle 4"/>
+          <p:cNvPr id="4" name="Rectangle 3"/>
           <p:cNvSpPr/>
           <p:nvPr/>
         </p:nvSpPr>
@@ -4751,7 +4705,7 @@
       </p:sp>
       <p:sp>
         <p:nvSpPr>
-          <p:cNvPr id="6" name="Rectangle 5"/>
+          <p:cNvPr id="5" name="Rectangle 4"/>
           <p:cNvSpPr/>
           <p:nvPr/>
         </p:nvSpPr>
@@ -4792,7 +4746,7 @@
       </p:sp>
       <p:sp>
         <p:nvSpPr>
-          <p:cNvPr id="7" name="TextBox 6"/>
+          <p:cNvPr id="6" name="TextBox 5"/>
           <p:cNvSpPr txBox="1"/>
           <p:nvPr/>
         </p:nvSpPr>
@@ -4834,7 +4788,7 @@
       </p:sp>
       <p:sp>
         <p:nvSpPr>
-          <p:cNvPr id="8" name="TextBox 7"/>
+          <p:cNvPr id="7" name="TextBox 6"/>
           <p:cNvSpPr txBox="1"/>
           <p:nvPr/>
         </p:nvSpPr>
@@ -4876,7 +4830,7 @@
       </p:sp>
       <p:sp>
         <p:nvSpPr>
-          <p:cNvPr id="9" name="TextBox 8"/>
+          <p:cNvPr id="8" name="TextBox 7"/>
           <p:cNvSpPr txBox="1"/>
           <p:nvPr/>
         </p:nvSpPr>
@@ -4975,7 +4929,7 @@
       </p:sp>
       <p:sp>
         <p:nvSpPr>
-          <p:cNvPr id="10" name="Rectangle 9"/>
+          <p:cNvPr id="9" name="Rectangle 8"/>
           <p:cNvSpPr/>
           <p:nvPr/>
         </p:nvSpPr>
@@ -5016,7 +4970,7 @@
       </p:sp>
       <p:sp>
         <p:nvSpPr>
-          <p:cNvPr id="11" name="Rectangle 10"/>
+          <p:cNvPr id="10" name="Rectangle 9"/>
           <p:cNvSpPr/>
           <p:nvPr/>
         </p:nvSpPr>
@@ -5057,7 +5011,7 @@
       </p:sp>
       <p:sp>
         <p:nvSpPr>
-          <p:cNvPr id="12" name="Rectangle 11"/>
+          <p:cNvPr id="11" name="Rectangle 10"/>
           <p:cNvSpPr/>
           <p:nvPr/>
         </p:nvSpPr>
@@ -5098,7 +5052,7 @@
       </p:sp>
       <p:sp>
         <p:nvSpPr>
-          <p:cNvPr id="13" name="TextBox 12"/>
+          <p:cNvPr id="12" name="TextBox 11"/>
           <p:cNvSpPr txBox="1"/>
           <p:nvPr/>
         </p:nvSpPr>
@@ -5140,7 +5094,7 @@
       </p:sp>
       <p:sp>
         <p:nvSpPr>
-          <p:cNvPr id="14" name="TextBox 13"/>
+          <p:cNvPr id="13" name="TextBox 12"/>
           <p:cNvSpPr txBox="1"/>
           <p:nvPr/>
         </p:nvSpPr>
@@ -5182,7 +5136,7 @@
       </p:sp>
       <p:sp>
         <p:nvSpPr>
-          <p:cNvPr id="15" name="TextBox 14"/>
+          <p:cNvPr id="14" name="TextBox 13"/>
           <p:cNvSpPr txBox="1"/>
           <p:nvPr/>
         </p:nvSpPr>
@@ -5281,7 +5235,7 @@
       </p:sp>
       <p:sp>
         <p:nvSpPr>
-          <p:cNvPr id="16" name="Rectangle 15"/>
+          <p:cNvPr id="15" name="Rectangle 14"/>
           <p:cNvSpPr/>
           <p:nvPr/>
         </p:nvSpPr>
@@ -5324,7 +5278,7 @@
       </p:sp>
       <p:sp>
         <p:nvSpPr>
-          <p:cNvPr id="17" name="Rectangle 16"/>
+          <p:cNvPr id="16" name="Rectangle 15"/>
           <p:cNvSpPr/>
           <p:nvPr/>
         </p:nvSpPr>
@@ -5365,7 +5319,7 @@
       </p:sp>
       <p:sp>
         <p:nvSpPr>
-          <p:cNvPr id="18" name="TextBox 17"/>
+          <p:cNvPr id="17" name="TextBox 16"/>
           <p:cNvSpPr txBox="1"/>
           <p:nvPr/>
         </p:nvSpPr>
@@ -5483,7 +5437,7 @@
       </p:sp>
       <p:sp>
         <p:nvSpPr>
-          <p:cNvPr id="19" name="TextBox 18"/>
+          <p:cNvPr id="18" name="TextBox 17"/>
           <p:cNvSpPr txBox="1"/>
           <p:nvPr/>
         </p:nvSpPr>

--- a/assets/memos/B3-memo.pptx
+++ b/assets/memos/B3-memo.pptx
@@ -3156,7 +3156,7 @@
                 </a:solidFill>
                 <a:latin typeface="Arial"/>
               </a:rPr>
-              <a:t>Avant de commencer — Vérifiez vos prérequis | Qu'est-ce que FranceConnect ? | Points de vigilance</a:t>
+              <a:t>Avant de commencer — Vérifiez vos prérequis | Qu'est-ce que FranceConnect ? | Choisir son fournisseur d'identité</a:t>
             </a:r>
           </a:p>
         </p:txBody>
@@ -3730,7 +3730,7 @@
                 </a:solidFill>
                 <a:latin typeface="Arial"/>
               </a:rPr>
-              <a:t>→ Accédez à des centaines de services : Ameli, impots.gouv, CAF, Mon Espace Santé, France Travail</a:t>
+              <a:t>→ Accédez à des centaines de services : Ameli, impots.gouv,_x000B_CAF, Mon Espace Santé, France Travail</a:t>
             </a:r>
           </a:p>
           <a:p>
@@ -3768,7 +3768,7 @@
                 </a:solidFill>
                 <a:latin typeface="Arial"/>
               </a:rPr>
-              <a:t>→ Aucun mot de passe supplémentaire. FranceConnect ne stocke pas vos données — il vérifie votre identité.</a:t>
+              <a:t>→ Aucun mot de passe supplémentaire. FranceConnect ne stocke_x000B_pas vos données — il vérifie votre identité.</a:t>
             </a:r>
           </a:p>
         </p:txBody>
@@ -3782,7 +3782,7 @@
         <p:spPr>
           <a:xfrm>
             <a:off x="532800" y="4946400"/>
-            <a:ext cx="6490800" cy="1371600"/>
+            <a:ext cx="6490800" cy="1533600"/>
           </a:xfrm>
           <a:prstGeom prst="rect">
             <a:avLst/>
@@ -3823,7 +3823,7 @@
         <p:spPr>
           <a:xfrm>
             <a:off x="532800" y="4946400"/>
-            <a:ext cx="572400" cy="1371600"/>
+            <a:ext cx="572400" cy="1533600"/>
           </a:xfrm>
           <a:prstGeom prst="rect">
             <a:avLst/>
@@ -3975,7 +3975,7 @@
                 </a:solidFill>
                 <a:latin typeface="Arial"/>
               </a:rPr>
-              <a:t>Points de vigilance</a:t>
+              <a:t>Choisir son fournisseur d'identité</a:t>
             </a:r>
           </a:p>
         </p:txBody>
@@ -3989,7 +3989,7 @@
         <p:spPr>
           <a:xfrm>
             <a:off x="1159200" y="5410800"/>
-            <a:ext cx="5828400" cy="871200"/>
+            <a:ext cx="5828400" cy="1033199"/>
           </a:xfrm>
           <a:prstGeom prst="rect">
             <a:avLst/>
@@ -4017,7 +4017,7 @@
                 </a:solidFill>
                 <a:latin typeface="Arial"/>
               </a:rPr>
-              <a:t>→ Communiquer vos identifiants à quelqu'un d'autre</a:t>
+              <a:t>→ Comment choisir ?</a:t>
             </a:r>
           </a:p>
           <a:p>
@@ -4036,7 +4036,7 @@
                 </a:solidFill>
                 <a:latin typeface="Arial"/>
               </a:rPr>
-              <a:t>→ Cliquer sur un lien FranceConnect reçu par e-mail</a:t>
+              <a:t>→ Une liste de fournisseurs s'affiche : La Poste, Impôts, Ameli,</a:t>
             </a:r>
           </a:p>
           <a:p>
@@ -4055,7 +4055,7 @@
                 </a:solidFill>
                 <a:latin typeface="Arial"/>
               </a:rPr>
-              <a:t>→ Utiliser FranceConnect sur un appareil public ou partagé</a:t>
+              <a:t>→ Choisissez un service où vous avez déjà un compte_x000B_Ex : La Poste, Ameli, impots.gouv</a:t>
             </a:r>
           </a:p>
           <a:p>
@@ -4074,7 +4074,7 @@
                 </a:solidFill>
                 <a:latin typeface="Arial"/>
               </a:rPr>
-              <a:t>→ Oublier de se déconnecter sur un ordinateur partagé</a:t>
+              <a:t>→ Cliquez sur le nom du fournisseur,_x000B_Vous êtes redirigé vers sa page de connexion.</a:t>
             </a:r>
           </a:p>
         </p:txBody>
@@ -4087,8 +4087,8 @@
         </p:nvSpPr>
         <p:spPr>
           <a:xfrm>
-            <a:off x="532800" y="6382800"/>
-            <a:ext cx="6490800" cy="1371600"/>
+            <a:off x="532800" y="6544800"/>
+            <a:ext cx="6490800" cy="1533600"/>
           </a:xfrm>
           <a:prstGeom prst="rect">
             <a:avLst/>
@@ -4128,8 +4128,8 @@
         </p:nvSpPr>
         <p:spPr>
           <a:xfrm>
-            <a:off x="532800" y="6382800"/>
-            <a:ext cx="572400" cy="1371600"/>
+            <a:off x="532800" y="6544800"/>
+            <a:ext cx="572400" cy="1533600"/>
           </a:xfrm>
           <a:prstGeom prst="rect">
             <a:avLst/>
@@ -4169,7 +4169,7 @@
         </p:nvSpPr>
         <p:spPr>
           <a:xfrm>
-            <a:off x="1206000" y="6803999"/>
+            <a:off x="1206000" y="6966000"/>
             <a:ext cx="5752800" cy="7200"/>
           </a:xfrm>
           <a:prstGeom prst="rect">
@@ -4210,7 +4210,7 @@
         </p:nvSpPr>
         <p:spPr>
           <a:xfrm>
-            <a:off x="532800" y="6449400"/>
+            <a:off x="532800" y="6611399"/>
             <a:ext cx="572400" cy="288000"/>
           </a:xfrm>
           <a:prstGeom prst="rect">
@@ -4252,7 +4252,7 @@
         </p:nvSpPr>
         <p:spPr>
           <a:xfrm>
-            <a:off x="1177200" y="6418800"/>
+            <a:off x="1177200" y="6580800"/>
             <a:ext cx="5810400" cy="370799"/>
           </a:xfrm>
           <a:prstGeom prst="rect">
@@ -4281,7 +4281,7 @@
                 </a:solidFill>
                 <a:latin typeface="Arial"/>
               </a:rPr>
-              <a:t>DÉPANNAGE</a:t>
+              <a:t>Valider et accéder à votre espace</a:t>
             </a:r>
           </a:p>
         </p:txBody>
@@ -4294,8 +4294,8 @@
         </p:nvSpPr>
         <p:spPr>
           <a:xfrm>
-            <a:off x="1159200" y="6847200"/>
-            <a:ext cx="5828400" cy="871200"/>
+            <a:off x="1159200" y="7009200"/>
+            <a:ext cx="5828400" cy="1033199"/>
           </a:xfrm>
           <a:prstGeom prst="rect">
             <a:avLst/>
@@ -4323,7 +4323,7 @@
                 </a:solidFill>
                 <a:latin typeface="Arial"/>
               </a:rPr>
-              <a:t>→ ERREUR Y000001 OU E000008</a:t>
+              <a:t>→ Une demande d'autorisation s'affiche,_x000B_Lisez attentivement les informations demandées.</a:t>
             </a:r>
           </a:p>
           <a:p>
@@ -4342,7 +4342,7 @@
                 </a:solidFill>
                 <a:latin typeface="Arial"/>
               </a:rPr>
-              <a:t>→ Votre session n'a pas fonctionné. Solution :</a:t>
+              <a:t>→ Cliquez sur « Autoriser »,_x000B_Vous confirmez le partage de votre identité.</a:t>
             </a:r>
           </a:p>
           <a:p>
@@ -4361,7 +4361,7 @@
                 </a:solidFill>
                 <a:latin typeface="Arial"/>
               </a:rPr>
-              <a:t>→ Fermez complètement votre navigateur (tous les onglets)</a:t>
+              <a:t>→ Redirection automatique,_x000B_Vous revenez sur le site de départ.</a:t>
             </a:r>
           </a:p>
           <a:p>
@@ -4380,7 +4380,7 @@
                 </a:solidFill>
                 <a:latin typeface="Arial"/>
               </a:rPr>
-              <a:t>→ Rouvrez-le et tapez l'adresse du site directement (pas de raccourci)</a:t>
+              <a:t>→ Votre espace s'ouvre _x000B_À chaque connexion future, un simple clic sur_x000B_FranceConnect suffira.</a:t>
             </a:r>
           </a:p>
         </p:txBody>
@@ -4393,7 +4393,7 @@
         </p:nvSpPr>
         <p:spPr>
           <a:xfrm>
-            <a:off x="532800" y="7891199"/>
+            <a:off x="532800" y="8215199"/>
             <a:ext cx="6490800" cy="658800"/>
           </a:xfrm>
           <a:prstGeom prst="rect">
@@ -4436,7 +4436,7 @@
         </p:nvSpPr>
         <p:spPr>
           <a:xfrm>
-            <a:off x="1540799" y="7927200"/>
+            <a:off x="1540799" y="8251199"/>
             <a:ext cx="5410800" cy="604800"/>
           </a:xfrm>
           <a:prstGeom prst="rect">
@@ -4465,7 +4465,7 @@
                 </a:solidFill>
                 <a:latin typeface="Arial"/>
               </a:rPr>
-              <a:t>→ Suite en page 2 : CHECKLIST | QUIZ D'ÉVALUATION — Testez vos connaissances</a:t>
+              <a:t>→ Suite en page 2 : Points de vigilance | MES IDENTIFIANTS NE FONCTIONNENT PAS | CHECKLIST</a:t>
             </a:r>
           </a:p>
           <a:p>
@@ -4616,7 +4616,7 @@
                 </a:solidFill>
                 <a:latin typeface="Arial"/>
               </a:rPr>
-              <a:t>Avant de commencer — Vérifiez vos prérequis | Qu'est-ce que FranceConnect ? | Points de vigilance</a:t>
+              <a:t>Avant de commencer — Vérifiez vos prérequis | Qu'est-ce que FranceConnect ? | Choisir son fournisseur d'identité</a:t>
             </a:r>
           </a:p>
         </p:txBody>
@@ -4823,7 +4823,7 @@
                 </a:solidFill>
                 <a:latin typeface="Arial"/>
               </a:rPr>
-              <a:t>CHECKLIST</a:t>
+              <a:t>Points de vigilance</a:t>
             </a:r>
           </a:p>
         </p:txBody>
@@ -4865,7 +4865,7 @@
                 </a:solidFill>
                 <a:latin typeface="Arial"/>
               </a:rPr>
-              <a:t>→ Avant de commencer, assurez-vous que vous êtes en sécurité :</a:t>
+              <a:t>→ Communiquer vos identifiants à quelqu'un d'autre</a:t>
             </a:r>
           </a:p>
           <a:p>
@@ -4884,7 +4884,7 @@
                 </a:solidFill>
                 <a:latin typeface="Arial"/>
               </a:rPr>
-              <a:t>→ Sur votre appareil</a:t>
+              <a:t>→ Cliquer sur un lien FranceConnect reçu par e-mail</a:t>
             </a:r>
           </a:p>
           <a:p>
@@ -4903,7 +4903,7 @@
                 </a:solidFill>
                 <a:latin typeface="Arial"/>
               </a:rPr>
-              <a:t>→ Vous êtes sur votre ordinateur personnel (pas un appareil partagé)</a:t>
+              <a:t>→ Utiliser FranceConnect sur un appareil public ou partagé</a:t>
             </a:r>
           </a:p>
           <a:p>
@@ -4922,7 +4922,7 @@
                 </a:solidFill>
                 <a:latin typeface="Arial"/>
               </a:rPr>
-              <a:t>→ Votre antivirus est à jour</a:t>
+              <a:t>→ Oublier de se déconnecter sur un ordinateur partagé</a:t>
             </a:r>
           </a:p>
         </p:txBody>
@@ -4936,7 +4936,7 @@
         <p:spPr>
           <a:xfrm>
             <a:off x="532800" y="3186000"/>
-            <a:ext cx="6490800" cy="1382400"/>
+            <a:ext cx="6490800" cy="1371600"/>
           </a:xfrm>
           <a:prstGeom prst="rect">
             <a:avLst/>
@@ -4977,7 +4977,7 @@
         <p:spPr>
           <a:xfrm>
             <a:off x="532800" y="3186000"/>
-            <a:ext cx="572400" cy="1382400"/>
+            <a:ext cx="572400" cy="1371600"/>
           </a:xfrm>
           <a:prstGeom prst="rect">
             <a:avLst/>
@@ -5129,7 +5129,7 @@
                 </a:solidFill>
                 <a:latin typeface="Arial"/>
               </a:rPr>
-              <a:t>QUIZ D'ÉVALUATION — Testez vos connaissances</a:t>
+              <a:t>MES IDENTIFIANTS NE FONCTIONNENT PAS</a:t>
             </a:r>
           </a:p>
         </p:txBody>
@@ -5143,7 +5143,7 @@
         <p:spPr>
           <a:xfrm>
             <a:off x="1159200" y="3650399"/>
-            <a:ext cx="5828400" cy="881999"/>
+            <a:ext cx="5828400" cy="871200"/>
           </a:xfrm>
           <a:prstGeom prst="rect">
             <a:avLst/>
@@ -5171,7 +5171,7 @@
                 </a:solidFill>
                 <a:latin typeface="Arial"/>
               </a:rPr>
-              <a:t>→ Question 1 : Qu'est-ce que FranceConnect ?</a:t>
+              <a:t>→ Vérifiez que vous utilisez les bons identifiants pour le fournisseur choisi</a:t>
             </a:r>
           </a:p>
           <a:p>
@@ -5190,7 +5190,7 @@
                 </a:solidFill>
                 <a:latin typeface="Arial"/>
               </a:rPr>
-              <a:t>→ A) Un nouveau mot de passe pour tous les services</a:t>
+              <a:t>→ Réinitialisez votre mot de passe sur le site du fournisseur</a:t>
             </a:r>
           </a:p>
           <a:p>
@@ -5209,7 +5209,7 @@
                 </a:solidFill>
                 <a:latin typeface="Arial"/>
               </a:rPr>
-              <a:t>→ B) Un service d'État qui vous permet d'accéder à 1 800+ services avec un seul identifiant</a:t>
+              <a:t>→ Dépannage — Les erreurs courantes</a:t>
             </a:r>
           </a:p>
           <a:p>
@@ -5228,7 +5228,7 @@
                 </a:solidFill>
                 <a:latin typeface="Arial"/>
               </a:rPr>
-              <a:t>→ C) Une application à télécharger obligatoirement</a:t>
+              <a:t>→ ERREUR Y000001 OU E000008</a:t>
             </a:r>
           </a:p>
         </p:txBody>
@@ -5236,6 +5236,312 @@
       <p:sp>
         <p:nvSpPr>
           <p:cNvPr id="15" name="Rectangle 14"/>
+          <p:cNvSpPr/>
+          <p:nvPr/>
+        </p:nvSpPr>
+        <p:spPr>
+          <a:xfrm>
+            <a:off x="532800" y="4622400"/>
+            <a:ext cx="6490800" cy="1371600"/>
+          </a:xfrm>
+          <a:prstGeom prst="rect">
+            <a:avLst/>
+          </a:prstGeom>
+          <a:solidFill>
+            <a:srgbClr val="ECF5FF"/>
+          </a:solidFill>
+          <a:ln>
+            <a:noFill/>
+          </a:ln>
+        </p:spPr>
+        <p:style>
+          <a:lnRef idx="1">
+            <a:schemeClr val="accent1"/>
+          </a:lnRef>
+          <a:fillRef idx="3">
+            <a:schemeClr val="accent1"/>
+          </a:fillRef>
+          <a:effectRef idx="2">
+            <a:schemeClr val="accent1"/>
+          </a:effectRef>
+          <a:fontRef idx="minor">
+            <a:schemeClr val="lt1"/>
+          </a:fontRef>
+        </p:style>
+        <p:txBody>
+          <a:bodyPr rtlCol="0" anchor="ctr"/>
+          <a:lstStyle/>
+          <a:p/>
+        </p:txBody>
+      </p:sp>
+      <p:sp>
+        <p:nvSpPr>
+          <p:cNvPr id="16" name="Rectangle 15"/>
+          <p:cNvSpPr/>
+          <p:nvPr/>
+        </p:nvSpPr>
+        <p:spPr>
+          <a:xfrm>
+            <a:off x="532800" y="4622400"/>
+            <a:ext cx="572400" cy="1371600"/>
+          </a:xfrm>
+          <a:prstGeom prst="rect">
+            <a:avLst/>
+          </a:prstGeom>
+          <a:solidFill>
+            <a:srgbClr val="4388BC"/>
+          </a:solidFill>
+          <a:ln>
+            <a:noFill/>
+          </a:ln>
+        </p:spPr>
+        <p:style>
+          <a:lnRef idx="1">
+            <a:schemeClr val="accent1"/>
+          </a:lnRef>
+          <a:fillRef idx="3">
+            <a:schemeClr val="accent1"/>
+          </a:fillRef>
+          <a:effectRef idx="2">
+            <a:schemeClr val="accent1"/>
+          </a:effectRef>
+          <a:fontRef idx="minor">
+            <a:schemeClr val="lt1"/>
+          </a:fontRef>
+        </p:style>
+        <p:txBody>
+          <a:bodyPr rtlCol="0" anchor="ctr"/>
+          <a:lstStyle/>
+          <a:p/>
+        </p:txBody>
+      </p:sp>
+      <p:sp>
+        <p:nvSpPr>
+          <p:cNvPr id="17" name="Rectangle 16"/>
+          <p:cNvSpPr/>
+          <p:nvPr/>
+        </p:nvSpPr>
+        <p:spPr>
+          <a:xfrm>
+            <a:off x="1206000" y="5043600"/>
+            <a:ext cx="5752800" cy="7200"/>
+          </a:xfrm>
+          <a:prstGeom prst="rect">
+            <a:avLst/>
+          </a:prstGeom>
+          <a:solidFill>
+            <a:srgbClr val="DDDDDD"/>
+          </a:solidFill>
+          <a:ln>
+            <a:noFill/>
+          </a:ln>
+        </p:spPr>
+        <p:style>
+          <a:lnRef idx="1">
+            <a:schemeClr val="accent1"/>
+          </a:lnRef>
+          <a:fillRef idx="3">
+            <a:schemeClr val="accent1"/>
+          </a:fillRef>
+          <a:effectRef idx="2">
+            <a:schemeClr val="accent1"/>
+          </a:effectRef>
+          <a:fontRef idx="minor">
+            <a:schemeClr val="lt1"/>
+          </a:fontRef>
+        </p:style>
+        <p:txBody>
+          <a:bodyPr rtlCol="0" anchor="ctr"/>
+          <a:lstStyle/>
+          <a:p/>
+        </p:txBody>
+      </p:sp>
+      <p:sp>
+        <p:nvSpPr>
+          <p:cNvPr id="18" name="TextBox 17"/>
+          <p:cNvSpPr txBox="1"/>
+          <p:nvPr/>
+        </p:nvSpPr>
+        <p:spPr>
+          <a:xfrm>
+            <a:off x="532800" y="4689000"/>
+            <a:ext cx="572400" cy="288000"/>
+          </a:xfrm>
+          <a:prstGeom prst="rect">
+            <a:avLst/>
+          </a:prstGeom>
+          <a:noFill/>
+        </p:spPr>
+        <p:txBody>
+          <a:bodyPr wrap="square" tIns="0" bIns="0" lIns="18000" rIns="18000">
+            <a:spAutoFit/>
+          </a:bodyPr>
+          <a:lstStyle/>
+          <a:p>
+            <a:pPr algn="ctr">
+              <a:spcBef>
+                <a:spcPts val="0"/>
+              </a:spcBef>
+              <a:spcAft>
+                <a:spcPts val="100"/>
+              </a:spcAft>
+            </a:pPr>
+            <a:r>
+              <a:rPr sz="2200" b="1" i="0">
+                <a:solidFill>
+                  <a:srgbClr val="FFFFFF"/>
+                </a:solidFill>
+                <a:latin typeface="Arial"/>
+              </a:rPr>
+              <a:t>7</a:t>
+            </a:r>
+          </a:p>
+        </p:txBody>
+      </p:sp>
+      <p:sp>
+        <p:nvSpPr>
+          <p:cNvPr id="19" name="TextBox 18"/>
+          <p:cNvSpPr txBox="1"/>
+          <p:nvPr/>
+        </p:nvSpPr>
+        <p:spPr>
+          <a:xfrm>
+            <a:off x="1177200" y="4658400"/>
+            <a:ext cx="5810400" cy="370799"/>
+          </a:xfrm>
+          <a:prstGeom prst="rect">
+            <a:avLst/>
+          </a:prstGeom>
+          <a:noFill/>
+        </p:spPr>
+        <p:txBody>
+          <a:bodyPr wrap="square" tIns="0" bIns="0" lIns="18000" rIns="18000">
+            <a:spAutoFit/>
+          </a:bodyPr>
+          <a:lstStyle/>
+          <a:p>
+            <a:pPr algn="l">
+              <a:spcBef>
+                <a:spcPts val="0"/>
+              </a:spcBef>
+              <a:spcAft>
+                <a:spcPts val="100"/>
+              </a:spcAft>
+            </a:pPr>
+            <a:r>
+              <a:rPr sz="1100" b="1" i="0">
+                <a:solidFill>
+                  <a:srgbClr val="4388BC"/>
+                </a:solidFill>
+                <a:latin typeface="Arial"/>
+              </a:rPr>
+              <a:t>CHECKLIST</a:t>
+            </a:r>
+          </a:p>
+        </p:txBody>
+      </p:sp>
+      <p:sp>
+        <p:nvSpPr>
+          <p:cNvPr id="20" name="TextBox 19"/>
+          <p:cNvSpPr txBox="1"/>
+          <p:nvPr/>
+        </p:nvSpPr>
+        <p:spPr>
+          <a:xfrm>
+            <a:off x="1159200" y="5086800"/>
+            <a:ext cx="5828400" cy="871200"/>
+          </a:xfrm>
+          <a:prstGeom prst="rect">
+            <a:avLst/>
+          </a:prstGeom>
+          <a:noFill/>
+        </p:spPr>
+        <p:txBody>
+          <a:bodyPr wrap="square" tIns="0" bIns="0" lIns="18000" rIns="18000">
+            <a:spAutoFit/>
+          </a:bodyPr>
+          <a:lstStyle/>
+          <a:p>
+            <a:pPr algn="l">
+              <a:spcBef>
+                <a:spcPts val="0"/>
+              </a:spcBef>
+              <a:spcAft>
+                <a:spcPts val="100"/>
+              </a:spcAft>
+            </a:pPr>
+            <a:r>
+              <a:rPr sz="1000" b="0" i="0">
+                <a:solidFill>
+                  <a:srgbClr val="2B2B2B"/>
+                </a:solidFill>
+                <a:latin typeface="Arial"/>
+              </a:rPr>
+              <a:t>→ Avant de commencer, assurez-vous que vous êtes en sécurité :</a:t>
+            </a:r>
+          </a:p>
+          <a:p>
+            <a:pPr algn="l">
+              <a:spcBef>
+                <a:spcPts val="0"/>
+              </a:spcBef>
+              <a:spcAft>
+                <a:spcPts val="100"/>
+              </a:spcAft>
+            </a:pPr>
+            <a:r>
+              <a:rPr sz="1000" b="0" i="0">
+                <a:solidFill>
+                  <a:srgbClr val="2B2B2B"/>
+                </a:solidFill>
+                <a:latin typeface="Arial"/>
+              </a:rPr>
+              <a:t>→ Sur votre appareil</a:t>
+            </a:r>
+          </a:p>
+          <a:p>
+            <a:pPr algn="l">
+              <a:spcBef>
+                <a:spcPts val="0"/>
+              </a:spcBef>
+              <a:spcAft>
+                <a:spcPts val="100"/>
+              </a:spcAft>
+            </a:pPr>
+            <a:r>
+              <a:rPr sz="1000" b="0" i="0">
+                <a:solidFill>
+                  <a:srgbClr val="2B2B2B"/>
+                </a:solidFill>
+                <a:latin typeface="Arial"/>
+              </a:rPr>
+              <a:t>→ Vous êtes sur votre ordinateur personnel (pas un appareil partagé)</a:t>
+            </a:r>
+          </a:p>
+          <a:p>
+            <a:pPr algn="l">
+              <a:spcBef>
+                <a:spcPts val="0"/>
+              </a:spcBef>
+              <a:spcAft>
+                <a:spcPts val="100"/>
+              </a:spcAft>
+            </a:pPr>
+            <a:r>
+              <a:rPr sz="1000" b="0" i="0">
+                <a:solidFill>
+                  <a:srgbClr val="2B2B2B"/>
+                </a:solidFill>
+                <a:latin typeface="Arial"/>
+              </a:rPr>
+              <a:t>→ Votre antivirus est à jour</a:t>
+            </a:r>
+          </a:p>
+        </p:txBody>
+      </p:sp>
+      <p:sp>
+        <p:nvSpPr>
+          <p:cNvPr id="21" name="Rectangle 20"/>
           <p:cNvSpPr/>
           <p:nvPr/>
         </p:nvSpPr>
@@ -5278,7 +5584,7 @@
       </p:sp>
       <p:sp>
         <p:nvSpPr>
-          <p:cNvPr id="16" name="Rectangle 15"/>
+          <p:cNvPr id="22" name="Rectangle 21"/>
           <p:cNvSpPr/>
           <p:nvPr/>
         </p:nvSpPr>
@@ -5319,7 +5625,7 @@
       </p:sp>
       <p:sp>
         <p:nvSpPr>
-          <p:cNvPr id="17" name="TextBox 16"/>
+          <p:cNvPr id="23" name="TextBox 22"/>
           <p:cNvSpPr txBox="1"/>
           <p:nvPr/>
         </p:nvSpPr>
@@ -5437,7 +5743,7 @@
       </p:sp>
       <p:sp>
         <p:nvSpPr>
-          <p:cNvPr id="18" name="TextBox 17"/>
+          <p:cNvPr id="24" name="TextBox 23"/>
           <p:cNvSpPr txBox="1"/>
           <p:nvPr/>
         </p:nvSpPr>
